--- a/UNIDAD 1/Actividad 1.3 Banco de Ejercicios_Eddi Castillo_ABD_6ISCM.pptx
+++ b/UNIDAD 1/Actividad 1.3 Banco de Ejercicios_Eddi Castillo_ABD_6ISCM.pptx
@@ -5,7 +5,7 @@
     <p:sldMasterId id="2147483648" r:id="rId1"/>
   </p:sldMasterIdLst>
   <p:notesMasterIdLst>
-    <p:notesMasterId r:id="rId10"/>
+    <p:notesMasterId r:id="rId12"/>
   </p:notesMasterIdLst>
   <p:sldIdLst>
     <p:sldId id="256" r:id="rId2"/>
@@ -15,7 +15,9 @@
     <p:sldId id="274" r:id="rId6"/>
     <p:sldId id="272" r:id="rId7"/>
     <p:sldId id="273" r:id="rId8"/>
-    <p:sldId id="270" r:id="rId9"/>
+    <p:sldId id="275" r:id="rId9"/>
+    <p:sldId id="270" r:id="rId10"/>
+    <p:sldId id="276" r:id="rId11"/>
   </p:sldIdLst>
   <p:sldSz cx="18288000" cy="10287000"/>
   <p:notesSz cx="6858000" cy="9144000"/>
@@ -538,6 +540,96 @@
 </p:notes>
 </file>
 
+<file path=ppt/notesSlides/notesSlide10.xml><?xml version="1.0" encoding="utf-8"?>
+<p:notes xmlns:a="http://schemas.openxmlformats.org/drawingml/2006/main" xmlns:r="http://schemas.openxmlformats.org/officeDocument/2006/relationships" xmlns:p="http://schemas.openxmlformats.org/presentationml/2006/main">
+  <p:cSld>
+    <p:spTree>
+      <p:nvGrpSpPr>
+        <p:cNvPr id="1" name=""/>
+        <p:cNvGrpSpPr/>
+        <p:nvPr/>
+      </p:nvGrpSpPr>
+      <p:grpSpPr bwMode="auto">
+        <a:xfrm>
+          <a:off x="0" y="0"/>
+          <a:ext cx="0" cy="0"/>
+          <a:chOff x="0" y="0"/>
+          <a:chExt cx="0" cy="0"/>
+        </a:xfrm>
+      </p:grpSpPr>
+      <p:sp>
+        <p:nvSpPr>
+          <p:cNvPr id="2" name="Slide Image Placeholder 1"/>
+          <p:cNvSpPr>
+            <a:spLocks noGrp="1" noRot="1" noChangeAspect="1"/>
+          </p:cNvSpPr>
+          <p:nvPr>
+            <p:ph type="sldImg"/>
+          </p:nvPr>
+        </p:nvSpPr>
+        <p:spPr bwMode="auto"/>
+      </p:sp>
+      <p:sp>
+        <p:nvSpPr>
+          <p:cNvPr id="3" name="Notes Placeholder 2"/>
+          <p:cNvSpPr>
+            <a:spLocks noGrp="1"/>
+          </p:cNvSpPr>
+          <p:nvPr>
+            <p:ph type="body" idx="1"/>
+          </p:nvPr>
+        </p:nvSpPr>
+        <p:spPr bwMode="auto"/>
+        <p:txBody>
+          <a:bodyPr/>
+          <a:lstStyle/>
+          <a:p>
+            <a:pPr>
+              <a:defRPr/>
+            </a:pPr>
+            <a:endParaRPr/>
+          </a:p>
+        </p:txBody>
+      </p:sp>
+      <p:sp>
+        <p:nvSpPr>
+          <p:cNvPr id="4" name="Slide Number Placeholder 3"/>
+          <p:cNvSpPr>
+            <a:spLocks noGrp="1"/>
+          </p:cNvSpPr>
+          <p:nvPr>
+            <p:ph type="sldNum" sz="quarter" idx="10"/>
+          </p:nvPr>
+        </p:nvSpPr>
+        <p:spPr bwMode="auto"/>
+        <p:txBody>
+          <a:bodyPr/>
+          <a:lstStyle/>
+          <a:p>
+            <a:pPr>
+              <a:defRPr/>
+            </a:pPr>
+            <a:fld id="{B09EC8BC-B3D1-A74E-C214-6A6C616F21EC}" type="slidenum">
+              <a:rPr/>
+              <a:t>10</a:t>
+            </a:fld>
+            <a:endParaRPr/>
+          </a:p>
+        </p:txBody>
+      </p:sp>
+    </p:spTree>
+    <p:extLst>
+      <p:ext uri="{BB962C8B-B14F-4D97-AF65-F5344CB8AC3E}">
+        <p14:creationId xmlns:p14="http://schemas.microsoft.com/office/powerpoint/2010/main" val="2008187832"/>
+      </p:ext>
+    </p:extLst>
+  </p:cSld>
+  <p:clrMapOvr>
+    <a:masterClrMapping/>
+  </p:clrMapOvr>
+</p:notes>
+</file>
+
 <file path=ppt/notesSlides/notesSlide2.xml><?xml version="1.0" encoding="utf-8"?>
 <p:notes xmlns:a="http://schemas.openxmlformats.org/drawingml/2006/main" xmlns:r="http://schemas.openxmlformats.org/officeDocument/2006/relationships" xmlns:p="http://schemas.openxmlformats.org/presentationml/2006/main">
   <p:cSld>
@@ -1132,9 +1224,99 @@
             <a:pPr>
               <a:defRPr/>
             </a:pPr>
+            <a:fld id="{3EF4ED26-2ED6-CA49-D44C-D0E4AC6549F6}" type="slidenum">
+              <a:rPr/>
+              <a:t>8</a:t>
+            </a:fld>
+            <a:endParaRPr/>
+          </a:p>
+        </p:txBody>
+      </p:sp>
+    </p:spTree>
+    <p:extLst>
+      <p:ext uri="{BB962C8B-B14F-4D97-AF65-F5344CB8AC3E}">
+        <p14:creationId xmlns:p14="http://schemas.microsoft.com/office/powerpoint/2010/main" val="3547634479"/>
+      </p:ext>
+    </p:extLst>
+  </p:cSld>
+  <p:clrMapOvr>
+    <a:masterClrMapping/>
+  </p:clrMapOvr>
+</p:notes>
+</file>
+
+<file path=ppt/notesSlides/notesSlide9.xml><?xml version="1.0" encoding="utf-8"?>
+<p:notes xmlns:a="http://schemas.openxmlformats.org/drawingml/2006/main" xmlns:r="http://schemas.openxmlformats.org/officeDocument/2006/relationships" xmlns:p="http://schemas.openxmlformats.org/presentationml/2006/main">
+  <p:cSld>
+    <p:spTree>
+      <p:nvGrpSpPr>
+        <p:cNvPr id="1" name=""/>
+        <p:cNvGrpSpPr/>
+        <p:nvPr/>
+      </p:nvGrpSpPr>
+      <p:grpSpPr bwMode="auto">
+        <a:xfrm>
+          <a:off x="0" y="0"/>
+          <a:ext cx="0" cy="0"/>
+          <a:chOff x="0" y="0"/>
+          <a:chExt cx="0" cy="0"/>
+        </a:xfrm>
+      </p:grpSpPr>
+      <p:sp>
+        <p:nvSpPr>
+          <p:cNvPr id="2" name="Slide Image Placeholder 1"/>
+          <p:cNvSpPr>
+            <a:spLocks noGrp="1" noRot="1" noChangeAspect="1"/>
+          </p:cNvSpPr>
+          <p:nvPr>
+            <p:ph type="sldImg"/>
+          </p:nvPr>
+        </p:nvSpPr>
+        <p:spPr bwMode="auto"/>
+      </p:sp>
+      <p:sp>
+        <p:nvSpPr>
+          <p:cNvPr id="3" name="Notes Placeholder 2"/>
+          <p:cNvSpPr>
+            <a:spLocks noGrp="1"/>
+          </p:cNvSpPr>
+          <p:nvPr>
+            <p:ph type="body" idx="1"/>
+          </p:nvPr>
+        </p:nvSpPr>
+        <p:spPr bwMode="auto"/>
+        <p:txBody>
+          <a:bodyPr/>
+          <a:lstStyle/>
+          <a:p>
+            <a:pPr>
+              <a:defRPr/>
+            </a:pPr>
+            <a:endParaRPr/>
+          </a:p>
+        </p:txBody>
+      </p:sp>
+      <p:sp>
+        <p:nvSpPr>
+          <p:cNvPr id="4" name="Slide Number Placeholder 3"/>
+          <p:cNvSpPr>
+            <a:spLocks noGrp="1"/>
+          </p:cNvSpPr>
+          <p:nvPr>
+            <p:ph type="sldNum" sz="quarter" idx="10"/>
+          </p:nvPr>
+        </p:nvSpPr>
+        <p:spPr bwMode="auto"/>
+        <p:txBody>
+          <a:bodyPr/>
+          <a:lstStyle/>
+          <a:p>
+            <a:pPr>
+              <a:defRPr/>
+            </a:pPr>
             <a:fld id="{B09EC8BC-B3D1-A74E-C214-6A6C616F21EC}" type="slidenum">
               <a:rPr/>
-              <a:t>8</a:t>
+              <a:t>9</a:t>
             </a:fld>
             <a:endParaRPr/>
           </a:p>
@@ -1336,7 +1518,7 @@
             </a:pPr>
             <a:fld id="{1D8BD707-D9CF-40AE-B4C6-C98DA3205C09}" type="datetimeFigureOut">
               <a:rPr lang="en-US"/>
-              <a:t>6/3/2026</a:t>
+              <a:t>6/5/2026</a:t>
             </a:fld>
             <a:endParaRPr lang="en-US"/>
           </a:p>
@@ -1525,7 +1707,7 @@
             </a:pPr>
             <a:fld id="{1D8BD707-D9CF-40AE-B4C6-C98DA3205C09}" type="datetimeFigureOut">
               <a:rPr lang="en-US"/>
-              <a:t>6/3/2026</a:t>
+              <a:t>6/5/2026</a:t>
             </a:fld>
             <a:endParaRPr lang="en-US"/>
           </a:p>
@@ -1724,7 +1906,7 @@
             </a:pPr>
             <a:fld id="{1D8BD707-D9CF-40AE-B4C6-C98DA3205C09}" type="datetimeFigureOut">
               <a:rPr lang="en-US"/>
-              <a:t>6/3/2026</a:t>
+              <a:t>6/5/2026</a:t>
             </a:fld>
             <a:endParaRPr lang="en-US"/>
           </a:p>
@@ -1913,7 +2095,7 @@
             </a:pPr>
             <a:fld id="{1D8BD707-D9CF-40AE-B4C6-C98DA3205C09}" type="datetimeFigureOut">
               <a:rPr lang="en-US"/>
-              <a:t>6/3/2026</a:t>
+              <a:t>6/5/2026</a:t>
             </a:fld>
             <a:endParaRPr lang="en-US"/>
           </a:p>
@@ -2168,7 +2350,7 @@
             </a:pPr>
             <a:fld id="{1D8BD707-D9CF-40AE-B4C6-C98DA3205C09}" type="datetimeFigureOut">
               <a:rPr lang="en-US"/>
-              <a:t>6/3/2026</a:t>
+              <a:t>6/5/2026</a:t>
             </a:fld>
             <a:endParaRPr lang="en-US"/>
           </a:p>
@@ -2488,7 +2670,7 @@
             </a:pPr>
             <a:fld id="{1D8BD707-D9CF-40AE-B4C6-C98DA3205C09}" type="datetimeFigureOut">
               <a:rPr lang="en-US"/>
-              <a:t>6/3/2026</a:t>
+              <a:t>6/5/2026</a:t>
             </a:fld>
             <a:endParaRPr lang="en-US"/>
           </a:p>
@@ -2948,7 +3130,7 @@
             </a:pPr>
             <a:fld id="{1D8BD707-D9CF-40AE-B4C6-C98DA3205C09}" type="datetimeFigureOut">
               <a:rPr lang="en-US"/>
-              <a:t>6/3/2026</a:t>
+              <a:t>6/5/2026</a:t>
             </a:fld>
             <a:endParaRPr lang="en-US"/>
           </a:p>
@@ -3072,7 +3254,7 @@
             </a:pPr>
             <a:fld id="{1D8BD707-D9CF-40AE-B4C6-C98DA3205C09}" type="datetimeFigureOut">
               <a:rPr lang="en-US"/>
-              <a:t>6/3/2026</a:t>
+              <a:t>6/5/2026</a:t>
             </a:fld>
             <a:endParaRPr lang="en-US"/>
           </a:p>
@@ -3171,7 +3353,7 @@
             </a:pPr>
             <a:fld id="{1D8BD707-D9CF-40AE-B4C6-C98DA3205C09}" type="datetimeFigureOut">
               <a:rPr lang="en-US"/>
-              <a:t>6/3/2026</a:t>
+              <a:t>6/5/2026</a:t>
             </a:fld>
             <a:endParaRPr lang="en-US"/>
           </a:p>
@@ -3470,7 +3652,7 @@
             </a:pPr>
             <a:fld id="{1D8BD707-D9CF-40AE-B4C6-C98DA3205C09}" type="datetimeFigureOut">
               <a:rPr lang="en-US"/>
-              <a:t>6/3/2026</a:t>
+              <a:t>6/5/2026</a:t>
             </a:fld>
             <a:endParaRPr lang="en-US"/>
           </a:p>
@@ -3735,7 +3917,7 @@
             </a:pPr>
             <a:fld id="{1D8BD707-D9CF-40AE-B4C6-C98DA3205C09}" type="datetimeFigureOut">
               <a:rPr lang="en-US"/>
-              <a:t>6/3/2026</a:t>
+              <a:t>6/5/2026</a:t>
             </a:fld>
             <a:endParaRPr lang="en-US"/>
           </a:p>
@@ -3967,7 +4149,7 @@
             </a:pPr>
             <a:fld id="{1D8BD707-D9CF-40AE-B4C6-C98DA3205C09}" type="datetimeFigureOut">
               <a:rPr lang="en-US"/>
-              <a:t>6/3/2026</a:t>
+              <a:t>6/5/2026</a:t>
             </a:fld>
             <a:endParaRPr lang="en-US"/>
           </a:p>
@@ -5116,10 +5298,309 @@
     <mc:Choice Requires="p159">
       <p:transition/>
     </mc:Choice>
-    <mc:Fallback xmlns="" xmlns:m="http://schemas.openxmlformats.org/officeDocument/2006/math" xmlns:w="http://schemas.openxmlformats.org/wordprocessingml/2006/main">
+    <mc:Fallback xmlns:w="http://schemas.openxmlformats.org/wordprocessingml/2006/main" xmlns:m="http://schemas.openxmlformats.org/officeDocument/2006/math" xmlns="">
       <p:transition advClick="1"/>
     </mc:Fallback>
   </mc:AlternateContent>
+</p:sld>
+</file>
+
+<file path=ppt/slides/slide10.xml><?xml version="1.0" encoding="utf-8"?>
+<p:sld xmlns:a="http://schemas.openxmlformats.org/drawingml/2006/main" xmlns:r="http://schemas.openxmlformats.org/officeDocument/2006/relationships" xmlns:p="http://schemas.openxmlformats.org/presentationml/2006/main" showMasterPhAnim="0">
+  <p:cSld>
+    <p:bg>
+      <p:bgPr>
+        <a:gradFill>
+          <a:gsLst>
+            <a:gs pos="0">
+              <a:srgbClr val="000000">
+                <a:alpha val="100000"/>
+              </a:srgbClr>
+            </a:gs>
+            <a:gs pos="25000">
+              <a:srgbClr val="091689">
+                <a:alpha val="100000"/>
+              </a:srgbClr>
+            </a:gs>
+            <a:gs pos="50000">
+              <a:srgbClr val="3820AD">
+                <a:alpha val="100000"/>
+              </a:srgbClr>
+            </a:gs>
+            <a:gs pos="75000">
+              <a:srgbClr val="3820AD">
+                <a:alpha val="100000"/>
+              </a:srgbClr>
+            </a:gs>
+            <a:gs pos="100000">
+              <a:srgbClr val="200D7B">
+                <a:alpha val="100000"/>
+              </a:srgbClr>
+            </a:gs>
+          </a:gsLst>
+          <a:lin ang="2100000" scaled="1"/>
+        </a:gradFill>
+        <a:effectLst/>
+      </p:bgPr>
+    </p:bg>
+    <p:spTree>
+      <p:nvGrpSpPr>
+        <p:cNvPr id="1" name=""/>
+        <p:cNvGrpSpPr/>
+        <p:nvPr/>
+      </p:nvGrpSpPr>
+      <p:grpSpPr bwMode="auto">
+        <a:xfrm>
+          <a:off x="0" y="0"/>
+          <a:ext cx="0" cy="0"/>
+          <a:chOff x="0" y="0"/>
+          <a:chExt cx="0" cy="0"/>
+        </a:xfrm>
+      </p:grpSpPr>
+      <p:sp>
+        <p:nvSpPr>
+          <p:cNvPr id="1710098521" name="Freeform 8"/>
+          <p:cNvSpPr/>
+          <p:nvPr/>
+        </p:nvSpPr>
+        <p:spPr bwMode="auto">
+          <a:xfrm>
+            <a:off x="421081" y="521971"/>
+            <a:ext cx="5802923" cy="4114800"/>
+          </a:xfrm>
+          <a:custGeom>
+            <a:avLst/>
+            <a:gdLst/>
+            <a:ahLst/>
+            <a:cxnLst/>
+            <a:rect l="l" t="t" r="r" b="b"/>
+            <a:pathLst>
+              <a:path w="5802923" h="4114800" extrusionOk="0">
+                <a:moveTo>
+                  <a:pt x="0" y="0"/>
+                </a:moveTo>
+                <a:lnTo>
+                  <a:pt x="5802923" y="0"/>
+                </a:lnTo>
+                <a:lnTo>
+                  <a:pt x="5802923" y="4114800"/>
+                </a:lnTo>
+                <a:lnTo>
+                  <a:pt x="0" y="4114800"/>
+                </a:lnTo>
+                <a:lnTo>
+                  <a:pt x="0" y="0"/>
+                </a:lnTo>
+                <a:close/>
+              </a:path>
+            </a:pathLst>
+          </a:custGeom>
+          <a:blipFill rotWithShape="1">
+            <a:blip r:embed="rId3"/>
+            <a:stretch>
+              <a:fillRect/>
+            </a:stretch>
+          </a:blipFill>
+        </p:spPr>
+      </p:sp>
+      <p:sp>
+        <p:nvSpPr>
+          <p:cNvPr id="837217533" name="Freeform 9"/>
+          <p:cNvSpPr/>
+          <p:nvPr/>
+        </p:nvSpPr>
+        <p:spPr bwMode="auto">
+          <a:xfrm flipH="1" flipV="1">
+            <a:off x="12063996" y="5773361"/>
+            <a:ext cx="5802923" cy="4114800"/>
+          </a:xfrm>
+          <a:custGeom>
+            <a:avLst/>
+            <a:gdLst/>
+            <a:ahLst/>
+            <a:cxnLst/>
+            <a:rect l="l" t="t" r="r" b="b"/>
+            <a:pathLst>
+              <a:path w="5802923" h="4114800" extrusionOk="0">
+                <a:moveTo>
+                  <a:pt x="5802923" y="4114800"/>
+                </a:moveTo>
+                <a:lnTo>
+                  <a:pt x="0" y="4114800"/>
+                </a:lnTo>
+                <a:lnTo>
+                  <a:pt x="0" y="0"/>
+                </a:lnTo>
+                <a:lnTo>
+                  <a:pt x="5802923" y="0"/>
+                </a:lnTo>
+                <a:lnTo>
+                  <a:pt x="5802923" y="4114800"/>
+                </a:lnTo>
+                <a:close/>
+              </a:path>
+            </a:pathLst>
+          </a:custGeom>
+          <a:blipFill rotWithShape="1">
+            <a:blip r:embed="rId3"/>
+            <a:stretch>
+              <a:fillRect/>
+            </a:stretch>
+          </a:blipFill>
+        </p:spPr>
+      </p:sp>
+      <p:sp>
+        <p:nvSpPr>
+          <p:cNvPr id="552871635" name="AutoShape 10"/>
+          <p:cNvSpPr/>
+          <p:nvPr/>
+        </p:nvSpPr>
+        <p:spPr bwMode="auto">
+          <a:xfrm flipV="1">
+            <a:off x="6528547" y="607695"/>
+            <a:ext cx="10942241" cy="0"/>
+          </a:xfrm>
+          <a:prstGeom prst="line">
+            <a:avLst/>
+          </a:prstGeom>
+          <a:ln w="19050" cap="flat">
+            <a:solidFill>
+              <a:srgbClr val="FFFFFF"/>
+            </a:solidFill>
+            <a:prstDash val="solid"/>
+            <a:headEnd type="oval" w="lg" len="lg"/>
+            <a:tailEnd type="none" w="sm" len="sm"/>
+          </a:ln>
+        </p:spPr>
+      </p:sp>
+      <p:sp>
+        <p:nvSpPr>
+          <p:cNvPr id="1365982969" name="AutoShape 11"/>
+          <p:cNvSpPr/>
+          <p:nvPr/>
+        </p:nvSpPr>
+        <p:spPr bwMode="auto">
+          <a:xfrm flipH="1">
+            <a:off x="752883" y="9745287"/>
+            <a:ext cx="10942241" cy="0"/>
+          </a:xfrm>
+          <a:prstGeom prst="line">
+            <a:avLst/>
+          </a:prstGeom>
+          <a:ln w="19050" cap="flat">
+            <a:solidFill>
+              <a:srgbClr val="FFFFFF"/>
+            </a:solidFill>
+            <a:prstDash val="solid"/>
+            <a:headEnd type="oval" w="lg" len="lg"/>
+            <a:tailEnd type="none" w="sm" len="sm"/>
+          </a:ln>
+        </p:spPr>
+      </p:sp>
+      <p:sp>
+        <p:nvSpPr>
+          <p:cNvPr id="1237816248" name="TextBox 12"/>
+          <p:cNvSpPr txBox="1"/>
+          <p:nvPr/>
+        </p:nvSpPr>
+        <p:spPr bwMode="auto">
+          <a:xfrm>
+            <a:off x="5825861" y="3479905"/>
+            <a:ext cx="6636277" cy="5601533"/>
+          </a:xfrm>
+          <a:prstGeom prst="rect">
+            <a:avLst/>
+          </a:prstGeom>
+        </p:spPr>
+        <p:txBody>
+          <a:bodyPr lIns="0" tIns="0" rIns="0" bIns="0" rtlCol="0" anchor="t">
+            <a:spAutoFit/>
+          </a:bodyPr>
+          <a:lstStyle/>
+          <a:p>
+            <a:pPr algn="l"/>
+            <a:r>
+              <a:rPr lang="es-ES" sz="2800" b="0" i="0" dirty="0">
+                <a:solidFill>
+                  <a:schemeClr val="bg1"/>
+                </a:solidFill>
+                <a:effectLst/>
+                <a:latin typeface="pplxSerif"/>
+              </a:rPr>
+              <a:t>En esta práctica se logró crear bases de datos tablas e insertar registros en Oracle PostgreSQL y MySQL. También se comprobó que la información quedó guardada correctamente mediante consultas de verificación.</a:t>
+            </a:r>
+          </a:p>
+          <a:p>
+            <a:pPr algn="l"/>
+            <a:r>
+              <a:rPr lang="es-ES" sz="2800" b="0" i="0" dirty="0">
+                <a:solidFill>
+                  <a:schemeClr val="bg1"/>
+                </a:solidFill>
+                <a:effectLst/>
+                <a:latin typeface="pplxSerif"/>
+              </a:rPr>
+              <a:t>Gracias a esta actividad fue posible reforzar el uso de comandos básicos y comprender mejor el funcionamiento de cada sistema gestor. En general la práctica cumplió con su objetivo ya que permitió aplicar los conocimientos teóricos en un entorno real de trabajo.</a:t>
+            </a:r>
+          </a:p>
+        </p:txBody>
+      </p:sp>
+      <p:sp>
+        <p:nvSpPr>
+          <p:cNvPr id="702311257" name="TextBox 13"/>
+          <p:cNvSpPr txBox="1"/>
+          <p:nvPr/>
+        </p:nvSpPr>
+        <p:spPr bwMode="auto">
+          <a:xfrm>
+            <a:off x="4185995" y="1759034"/>
+            <a:ext cx="9916010" cy="1065079"/>
+          </a:xfrm>
+          <a:prstGeom prst="rect">
+            <a:avLst/>
+          </a:prstGeom>
+        </p:spPr>
+        <p:txBody>
+          <a:bodyPr lIns="0" tIns="0" rIns="0" bIns="0" rtlCol="0" anchor="t">
+            <a:spAutoFit/>
+          </a:bodyPr>
+          <a:lstStyle/>
+          <a:p>
+            <a:pPr marL="0" lvl="0" indent="0" algn="ctr">
+              <a:lnSpc>
+                <a:spcPts val="8758"/>
+              </a:lnSpc>
+              <a:spcBef>
+                <a:spcPts val="0"/>
+              </a:spcBef>
+              <a:defRPr/>
+            </a:pPr>
+            <a:r>
+              <a:rPr lang="en-US" sz="6250" u="none" strike="noStrike" spc="181" dirty="0">
+                <a:solidFill>
+                  <a:srgbClr val="FFFFFF"/>
+                </a:solidFill>
+                <a:latin typeface="Etna Sans Serif"/>
+                <a:ea typeface="Etna Sans Serif"/>
+                <a:cs typeface="Etna Sans Serif"/>
+              </a:rPr>
+              <a:t>Conclusion</a:t>
+            </a:r>
+            <a:endParaRPr dirty="0"/>
+          </a:p>
+        </p:txBody>
+      </p:sp>
+    </p:spTree>
+    <p:extLst>
+      <p:ext uri="{BB962C8B-B14F-4D97-AF65-F5344CB8AC3E}">
+        <p14:creationId xmlns:p14="http://schemas.microsoft.com/office/powerpoint/2010/main" val="3941032982"/>
+      </p:ext>
+    </p:extLst>
+  </p:cSld>
+  <p:clrMapOvr>
+    <a:masterClrMapping/>
+  </p:clrMapOvr>
+  <p:transition/>
 </p:sld>
 </file>
 
@@ -5486,7 +5967,7 @@
     <mc:Choice Requires="p159">
       <p:transition/>
     </mc:Choice>
-    <mc:Fallback xmlns="" xmlns:m="http://schemas.openxmlformats.org/officeDocument/2006/math" xmlns:w="http://schemas.openxmlformats.org/wordprocessingml/2006/main">
+    <mc:Fallback xmlns:w="http://schemas.openxmlformats.org/wordprocessingml/2006/main" xmlns:m="http://schemas.openxmlformats.org/officeDocument/2006/math" xmlns="">
       <p:transition advClick="1"/>
     </mc:Fallback>
   </mc:AlternateContent>
@@ -5856,7 +6337,7 @@
     <mc:Choice Requires="p159">
       <p:transition/>
     </mc:Choice>
-    <mc:Fallback xmlns="" xmlns:m="http://schemas.openxmlformats.org/officeDocument/2006/math" xmlns:w="http://schemas.openxmlformats.org/wordprocessingml/2006/main">
+    <mc:Fallback xmlns:w="http://schemas.openxmlformats.org/wordprocessingml/2006/main" xmlns:m="http://schemas.openxmlformats.org/officeDocument/2006/math" xmlns="">
       <p:transition advClick="1"/>
     </mc:Fallback>
   </mc:AlternateContent>
@@ -6476,7 +6957,7 @@
     <mc:Choice Requires="p159">
       <p:transition/>
     </mc:Choice>
-    <mc:Fallback xmlns="" xmlns:m="http://schemas.openxmlformats.org/officeDocument/2006/math" xmlns:w="http://schemas.openxmlformats.org/wordprocessingml/2006/main">
+    <mc:Fallback xmlns:w="http://schemas.openxmlformats.org/wordprocessingml/2006/main" xmlns:m="http://schemas.openxmlformats.org/officeDocument/2006/math" xmlns="">
       <p:transition advClick="1"/>
     </mc:Fallback>
   </mc:AlternateContent>
@@ -8212,6 +8693,462 @@
                 <a:alpha val="100000"/>
               </a:srgbClr>
             </a:gs>
+            <a:gs pos="33333">
+              <a:srgbClr val="091689">
+                <a:alpha val="100000"/>
+              </a:srgbClr>
+            </a:gs>
+            <a:gs pos="66667">
+              <a:srgbClr val="3820AD">
+                <a:alpha val="100000"/>
+              </a:srgbClr>
+            </a:gs>
+            <a:gs pos="100000">
+              <a:srgbClr val="000000">
+                <a:alpha val="100000"/>
+              </a:srgbClr>
+            </a:gs>
+          </a:gsLst>
+          <a:lin ang="2100000" scaled="1"/>
+        </a:gradFill>
+        <a:effectLst/>
+      </p:bgPr>
+    </p:bg>
+    <p:spTree>
+      <p:nvGrpSpPr>
+        <p:cNvPr id="1" name=""/>
+        <p:cNvGrpSpPr/>
+        <p:nvPr/>
+      </p:nvGrpSpPr>
+      <p:grpSpPr bwMode="auto">
+        <a:xfrm>
+          <a:off x="0" y="0"/>
+          <a:ext cx="0" cy="0"/>
+          <a:chOff x="0" y="0"/>
+          <a:chExt cx="0" cy="0"/>
+        </a:xfrm>
+      </p:grpSpPr>
+      <p:sp>
+        <p:nvSpPr>
+          <p:cNvPr id="4" name="TextBox 4"/>
+          <p:cNvSpPr txBox="1"/>
+          <p:nvPr/>
+        </p:nvSpPr>
+        <p:spPr bwMode="auto">
+          <a:xfrm>
+            <a:off x="2971800" y="7727633"/>
+            <a:ext cx="7706590" cy="2869215"/>
+          </a:xfrm>
+          <a:prstGeom prst="rect">
+            <a:avLst/>
+          </a:prstGeom>
+        </p:spPr>
+        <p:txBody>
+          <a:bodyPr lIns="50799" tIns="50799" rIns="50799" bIns="50799" rtlCol="0" anchor="ctr"/>
+          <a:lstStyle/>
+          <a:p>
+            <a:pPr>
+              <a:defRPr/>
+            </a:pPr>
+            <a:endParaRPr sz="2800" dirty="0">
+              <a:solidFill>
+                <a:schemeClr val="bg1"/>
+              </a:solidFill>
+              <a:latin typeface="Arial"/>
+              <a:cs typeface="Arial"/>
+            </a:endParaRPr>
+          </a:p>
+        </p:txBody>
+      </p:sp>
+      <p:sp>
+        <p:nvSpPr>
+          <p:cNvPr id="1473576313" name="TextBox 5"/>
+          <p:cNvSpPr txBox="1"/>
+          <p:nvPr/>
+        </p:nvSpPr>
+        <p:spPr bwMode="auto">
+          <a:xfrm>
+            <a:off x="419864" y="-174433"/>
+            <a:ext cx="11635416" cy="895886"/>
+          </a:xfrm>
+          <a:prstGeom prst="rect">
+            <a:avLst/>
+          </a:prstGeom>
+        </p:spPr>
+        <p:txBody>
+          <a:bodyPr lIns="0" tIns="0" rIns="0" bIns="0" rtlCol="0" anchor="t">
+            <a:spAutoFit/>
+          </a:bodyPr>
+          <a:lstStyle/>
+          <a:p>
+            <a:pPr marL="0" lvl="0" indent="0" algn="l">
+              <a:lnSpc>
+                <a:spcPts val="8366"/>
+              </a:lnSpc>
+              <a:spcBef>
+                <a:spcPts val="0"/>
+              </a:spcBef>
+              <a:defRPr/>
+            </a:pPr>
+            <a:r>
+              <a:rPr lang="es-ES" sz="2600" spc="173" dirty="0">
+                <a:solidFill>
+                  <a:srgbClr val="FFFFFF"/>
+                </a:solidFill>
+                <a:latin typeface="Etna Sans Serif"/>
+                <a:ea typeface="Etna Sans Serif"/>
+                <a:cs typeface="Etna Sans Serif"/>
+              </a:rPr>
+              <a:t>Ejercicio 4 	</a:t>
+            </a:r>
+            <a:r>
+              <a:rPr lang="es-ES" sz="2600" spc="173" dirty="0" err="1">
+                <a:solidFill>
+                  <a:srgbClr val="FFFFFF"/>
+                </a:solidFill>
+                <a:latin typeface="Etna Sans Serif"/>
+                <a:ea typeface="Etna Sans Serif"/>
+                <a:cs typeface="Etna Sans Serif"/>
+              </a:rPr>
+              <a:t>Creacion</a:t>
+            </a:r>
+            <a:r>
+              <a:rPr lang="es-ES" sz="2600" spc="173" dirty="0">
+                <a:solidFill>
+                  <a:srgbClr val="FFFFFF"/>
+                </a:solidFill>
+                <a:latin typeface="Etna Sans Serif"/>
+                <a:ea typeface="Etna Sans Serif"/>
+                <a:cs typeface="Etna Sans Serif"/>
+              </a:rPr>
+              <a:t> de base de datos en </a:t>
+            </a:r>
+            <a:r>
+              <a:rPr lang="es-ES" sz="2600" spc="173" dirty="0" err="1">
+                <a:solidFill>
+                  <a:srgbClr val="FFFFFF"/>
+                </a:solidFill>
+                <a:latin typeface="Etna Sans Serif"/>
+                <a:ea typeface="Etna Sans Serif"/>
+                <a:cs typeface="Etna Sans Serif"/>
+              </a:rPr>
+              <a:t>oracle</a:t>
+            </a:r>
+            <a:endParaRPr lang="es-ES" sz="2600" spc="172" dirty="0">
+              <a:solidFill>
+                <a:srgbClr val="FFFFFF"/>
+              </a:solidFill>
+              <a:latin typeface="Etna Sans Serif"/>
+              <a:ea typeface="Etna Sans Serif"/>
+              <a:cs typeface="Etna Sans Serif"/>
+            </a:endParaRPr>
+          </a:p>
+        </p:txBody>
+      </p:sp>
+      <p:sp>
+        <p:nvSpPr>
+          <p:cNvPr id="674078418" name="TextBox 15"/>
+          <p:cNvSpPr txBox="1"/>
+          <p:nvPr/>
+        </p:nvSpPr>
+        <p:spPr bwMode="auto">
+          <a:xfrm>
+            <a:off x="5780894" y="3863232"/>
+            <a:ext cx="913356" cy="274679"/>
+          </a:xfrm>
+          <a:prstGeom prst="rect">
+            <a:avLst/>
+          </a:prstGeom>
+        </p:spPr>
+        <p:txBody>
+          <a:bodyPr lIns="0" tIns="0" rIns="0" bIns="0" rtlCol="0" anchor="t">
+            <a:spAutoFit/>
+          </a:bodyPr>
+          <a:lstStyle/>
+          <a:p>
+            <a:pPr>
+              <a:defRPr/>
+            </a:pPr>
+            <a:endParaRPr/>
+          </a:p>
+        </p:txBody>
+      </p:sp>
+      <p:sp>
+        <p:nvSpPr>
+          <p:cNvPr id="1477880983" name="TextBox 19"/>
+          <p:cNvSpPr txBox="1"/>
+          <p:nvPr/>
+        </p:nvSpPr>
+        <p:spPr bwMode="auto">
+          <a:xfrm>
+            <a:off x="9055755" y="3863232"/>
+            <a:ext cx="913356" cy="1062841"/>
+          </a:xfrm>
+          <a:prstGeom prst="rect">
+            <a:avLst/>
+          </a:prstGeom>
+        </p:spPr>
+        <p:txBody>
+          <a:bodyPr lIns="0" tIns="0" rIns="0" bIns="0" rtlCol="0" anchor="t">
+            <a:spAutoFit/>
+          </a:bodyPr>
+          <a:lstStyle/>
+          <a:p>
+            <a:pPr marL="0" lvl="0" indent="0" algn="ctr">
+              <a:lnSpc>
+                <a:spcPts val="8366"/>
+              </a:lnSpc>
+              <a:spcBef>
+                <a:spcPts val="0"/>
+              </a:spcBef>
+              <a:defRPr/>
+            </a:pPr>
+            <a:endParaRPr/>
+          </a:p>
+        </p:txBody>
+      </p:sp>
+      <p:sp>
+        <p:nvSpPr>
+          <p:cNvPr id="225728624" name="CuadroTexto 225728623"/>
+          <p:cNvSpPr txBox="1"/>
+          <p:nvPr/>
+        </p:nvSpPr>
+        <p:spPr bwMode="auto">
+          <a:xfrm>
+            <a:off x="8936697" y="4960619"/>
+            <a:ext cx="414603" cy="365759"/>
+          </a:xfrm>
+          <a:prstGeom prst="rect">
+            <a:avLst/>
+          </a:prstGeom>
+          <a:noFill/>
+        </p:spPr>
+        <p:txBody>
+          <a:bodyPr vertOverflow="overflow" horzOverflow="overflow" vert="horz" wrap="square" lIns="91440" tIns="45720" rIns="91440" bIns="45720" numCol="1" spcCol="0" rtlCol="0" fromWordArt="0" anchor="t" anchorCtr="0" forceAA="0" compatLnSpc="0">
+            <a:spAutoFit/>
+          </a:bodyPr>
+          <a:lstStyle/>
+          <a:p>
+            <a:pPr algn="l">
+              <a:defRPr/>
+            </a:pPr>
+            <a:r>
+              <a:t>03</a:t>
+            </a:r>
+          </a:p>
+        </p:txBody>
+      </p:sp>
+      <p:sp>
+        <p:nvSpPr>
+          <p:cNvPr id="281985410" name="CuadroTexto 281985409"/>
+          <p:cNvSpPr txBox="1"/>
+          <p:nvPr/>
+        </p:nvSpPr>
+        <p:spPr bwMode="auto">
+          <a:xfrm>
+            <a:off x="8936697" y="4960619"/>
+            <a:ext cx="414603" cy="365759"/>
+          </a:xfrm>
+          <a:prstGeom prst="rect">
+            <a:avLst/>
+          </a:prstGeom>
+          <a:noFill/>
+        </p:spPr>
+        <p:txBody>
+          <a:bodyPr vertOverflow="overflow" horzOverflow="overflow" vert="horz" wrap="square" lIns="91440" tIns="45720" rIns="91440" bIns="45720" numCol="1" spcCol="0" rtlCol="0" fromWordArt="0" anchor="t" anchorCtr="0" forceAA="0" compatLnSpc="0">
+            <a:spAutoFit/>
+          </a:bodyPr>
+          <a:lstStyle/>
+          <a:p>
+            <a:pPr algn="l">
+              <a:defRPr/>
+            </a:pPr>
+            <a:r>
+              <a:t>03</a:t>
+            </a:r>
+          </a:p>
+        </p:txBody>
+      </p:sp>
+      <p:sp>
+        <p:nvSpPr>
+          <p:cNvPr id="154677705" name="CuadroTexto 154677704"/>
+          <p:cNvSpPr txBox="1"/>
+          <p:nvPr/>
+        </p:nvSpPr>
+        <p:spPr bwMode="auto">
+          <a:xfrm>
+            <a:off x="8936697" y="4960619"/>
+            <a:ext cx="414603" cy="365759"/>
+          </a:xfrm>
+          <a:prstGeom prst="rect">
+            <a:avLst/>
+          </a:prstGeom>
+          <a:noFill/>
+        </p:spPr>
+        <p:txBody>
+          <a:bodyPr vertOverflow="overflow" horzOverflow="overflow" vert="horz" wrap="square" lIns="91440" tIns="45720" rIns="91440" bIns="45720" numCol="1" spcCol="0" rtlCol="0" fromWordArt="0" anchor="t" anchorCtr="0" forceAA="0" compatLnSpc="0">
+            <a:spAutoFit/>
+          </a:bodyPr>
+          <a:lstStyle/>
+          <a:p>
+            <a:pPr algn="l">
+              <a:defRPr/>
+            </a:pPr>
+            <a:r>
+              <a:t>03</a:t>
+            </a:r>
+          </a:p>
+        </p:txBody>
+      </p:sp>
+      <p:sp>
+        <p:nvSpPr>
+          <p:cNvPr id="9" name="CuadroTexto 8">
+            <a:extLst>
+              <a:ext uri="{FF2B5EF4-FFF2-40B4-BE49-F238E27FC236}">
+                <a16:creationId xmlns:a16="http://schemas.microsoft.com/office/drawing/2014/main" id="{AF9E6529-3339-3DAD-E4E4-B8D348C52955}"/>
+              </a:ext>
+            </a:extLst>
+          </p:cNvPr>
+          <p:cNvSpPr txBox="1"/>
+          <p:nvPr/>
+        </p:nvSpPr>
+        <p:spPr>
+          <a:xfrm>
+            <a:off x="11562733" y="3619500"/>
+            <a:ext cx="6705599" cy="4401205"/>
+          </a:xfrm>
+          <a:prstGeom prst="rect">
+            <a:avLst/>
+          </a:prstGeom>
+          <a:noFill/>
+        </p:spPr>
+        <p:txBody>
+          <a:bodyPr wrap="square">
+            <a:spAutoFit/>
+          </a:bodyPr>
+          <a:lstStyle/>
+          <a:p>
+            <a:r>
+              <a:rPr lang="es-ES" sz="2000" dirty="0">
+                <a:solidFill>
+                  <a:schemeClr val="bg1"/>
+                </a:solidFill>
+              </a:rPr>
+              <a:t>n este ejercicio se trabajó con Oracle </a:t>
+            </a:r>
+            <a:r>
+              <a:rPr lang="es-ES" sz="2000" dirty="0" err="1">
+                <a:solidFill>
+                  <a:schemeClr val="bg1"/>
+                </a:solidFill>
+              </a:rPr>
+              <a:t>Database</a:t>
+            </a:r>
+            <a:r>
+              <a:rPr lang="es-ES" sz="2000" dirty="0">
+                <a:solidFill>
+                  <a:schemeClr val="bg1"/>
+                </a:solidFill>
+              </a:rPr>
+              <a:t> desde la terminal utilizando SQL*Plus. Primero se intentó entrar al contenedor de Oracle con Docker, aunque apareció un error inicial porque el comando no fue reconocido correctamente. Después se inició sesión en Oracle con el usuario </a:t>
+            </a:r>
+            <a:r>
+              <a:rPr lang="es-ES" sz="2000" dirty="0" err="1">
+                <a:solidFill>
+                  <a:schemeClr val="bg1"/>
+                </a:solidFill>
+              </a:rPr>
+              <a:t>system</a:t>
+            </a:r>
+            <a:r>
+              <a:rPr lang="es-ES" sz="2000" dirty="0">
+                <a:solidFill>
+                  <a:schemeClr val="bg1"/>
+                </a:solidFill>
+              </a:rPr>
+              <a:t> y se creó un nuevo usuario llamado </a:t>
+            </a:r>
+            <a:r>
+              <a:rPr lang="es-ES" sz="2000" dirty="0" err="1">
+                <a:solidFill>
+                  <a:schemeClr val="bg1"/>
+                </a:solidFill>
+              </a:rPr>
+              <a:t>tienda_oracle</a:t>
+            </a:r>
+            <a:r>
+              <a:rPr lang="es-ES" sz="2000" dirty="0">
+                <a:solidFill>
+                  <a:schemeClr val="bg1"/>
+                </a:solidFill>
+              </a:rPr>
+              <a:t>, asignándole permisos de conexión, recursos y espacio ilimitado. Luego se intentó conectarse con ese usuario, aunque hubo un pequeño error de sintaxis, pero se continuó con la creación de una tabla llamada productos. En esa tabla se agregaron campos como id, nombre, categoría, precio y stock. Finalmente, se insertaron varios productos de ejemplo, como café orgánico, azúcar y galletas, comprobando que la base de datos ya podía almacenar información correctamente.</a:t>
+            </a:r>
+          </a:p>
+        </p:txBody>
+      </p:sp>
+      <p:pic>
+        <p:nvPicPr>
+          <p:cNvPr id="5" name="Imagen 4">
+            <a:extLst>
+              <a:ext uri="{FF2B5EF4-FFF2-40B4-BE49-F238E27FC236}">
+                <a16:creationId xmlns:a16="http://schemas.microsoft.com/office/drawing/2014/main" id="{E8806F34-997F-AA89-1005-EB83C3B82FE8}"/>
+              </a:ext>
+            </a:extLst>
+          </p:cNvPr>
+          <p:cNvPicPr>
+            <a:picLocks noChangeAspect="1"/>
+          </p:cNvPicPr>
+          <p:nvPr/>
+        </p:nvPicPr>
+        <p:blipFill>
+          <a:blip r:embed="rId3">
+            <a:extLst>
+              <a:ext uri="{28A0092B-C50C-407E-A947-70E740481C1C}">
+                <a14:useLocalDpi xmlns:a14="http://schemas.microsoft.com/office/drawing/2010/main" val="0"/>
+              </a:ext>
+            </a:extLst>
+          </a:blip>
+          <a:stretch>
+            <a:fillRect/>
+          </a:stretch>
+        </p:blipFill>
+        <p:spPr>
+          <a:xfrm>
+            <a:off x="19665" y="3102799"/>
+            <a:ext cx="11125200" cy="5659946"/>
+          </a:xfrm>
+          <a:prstGeom prst="rect">
+            <a:avLst/>
+          </a:prstGeom>
+        </p:spPr>
+      </p:pic>
+    </p:spTree>
+    <p:extLst>
+      <p:ext uri="{BB962C8B-B14F-4D97-AF65-F5344CB8AC3E}">
+        <p14:creationId xmlns:p14="http://schemas.microsoft.com/office/powerpoint/2010/main" val="2329096321"/>
+      </p:ext>
+    </p:extLst>
+  </p:cSld>
+  <p:clrMapOvr>
+    <a:masterClrMapping/>
+  </p:clrMapOvr>
+  <p:transition/>
+</p:sld>
+</file>
+
+<file path=ppt/slides/slide9.xml><?xml version="1.0" encoding="utf-8"?>
+<p:sld xmlns:a="http://schemas.openxmlformats.org/drawingml/2006/main" xmlns:r="http://schemas.openxmlformats.org/officeDocument/2006/relationships" xmlns:p="http://schemas.openxmlformats.org/presentationml/2006/main" showMasterPhAnim="0">
+  <p:cSld>
+    <p:bg>
+      <p:bgPr>
+        <a:gradFill>
+          <a:gsLst>
+            <a:gs pos="0">
+              <a:srgbClr val="000000">
+                <a:alpha val="100000"/>
+              </a:srgbClr>
+            </a:gs>
             <a:gs pos="25000">
               <a:srgbClr val="091689">
                 <a:alpha val="100000"/>
@@ -8401,14 +9338,14 @@
         <p:spPr bwMode="auto">
           <a:xfrm>
             <a:off x="5825861" y="3479905"/>
-            <a:ext cx="6636277" cy="5601533"/>
+            <a:ext cx="6636277" cy="1723549"/>
           </a:xfrm>
           <a:prstGeom prst="rect">
             <a:avLst/>
           </a:prstGeom>
         </p:spPr>
         <p:txBody>
-          <a:bodyPr lIns="0" tIns="0" rIns="0" bIns="0" rtlCol="0" anchor="t">
+          <a:bodyPr wrap="square" lIns="0" tIns="0" rIns="0" bIns="0" rtlCol="0" anchor="t">
             <a:spAutoFit/>
           </a:bodyPr>
           <a:lstStyle/>
@@ -8422,21 +9359,38 @@
                 <a:effectLst/>
                 <a:latin typeface="pplxSerif"/>
               </a:rPr>
-              <a:t>En esta práctica se logró crear bases de datos tablas e insertar registros en Oracle PostgreSQL y MySQL. También se comprobó que la información quedó guardada correctamente mediante consultas de verificación.</a:t>
-            </a:r>
-          </a:p>
-          <a:p>
-            <a:pPr algn="l"/>
-            <a:r>
-              <a:rPr lang="es-ES" sz="2800" b="0" i="0" dirty="0">
+              <a:t>Anexo link de </a:t>
+            </a:r>
+            <a:r>
+              <a:rPr lang="es-ES" sz="2800" b="0" i="0" dirty="0" err="1">
                 <a:solidFill>
                   <a:schemeClr val="bg1"/>
                 </a:solidFill>
                 <a:effectLst/>
                 <a:latin typeface="pplxSerif"/>
               </a:rPr>
-              <a:t>Gracias a esta actividad fue posible reforzar el uso de comandos básicos y comprender mejor el funcionamiento de cada sistema gestor. En general la práctica cumplió con su objetivo ya que permitió aplicar los conocimientos teóricos en un entorno real de trabajo.</a:t>
-            </a:r>
+              <a:t>git</a:t>
+            </a:r>
+            <a:r>
+              <a:rPr lang="es-ES" sz="2800" b="0" i="0" dirty="0">
+                <a:solidFill>
+                  <a:schemeClr val="bg1"/>
+                </a:solidFill>
+                <a:effectLst/>
+                <a:latin typeface="pplxSerif"/>
+              </a:rPr>
+              <a:t>  https://github.com/eddiCastS/PRUEBAS-EN-BRUNO.git</a:t>
+            </a:r>
+          </a:p>
+          <a:p>
+            <a:pPr algn="l"/>
+            <a:endParaRPr lang="es-ES" sz="2800" b="0" i="0" dirty="0">
+              <a:solidFill>
+                <a:schemeClr val="bg1"/>
+              </a:solidFill>
+              <a:effectLst/>
+              <a:latin typeface="pplxSerif"/>
+            </a:endParaRPr>
           </a:p>
         </p:txBody>
       </p:sp>
@@ -8479,7 +9433,7 @@
                 <a:ea typeface="Etna Sans Serif"/>
                 <a:cs typeface="Etna Sans Serif"/>
               </a:rPr>
-              <a:t>Conclusion</a:t>
+              <a:t>Link de git hub</a:t>
             </a:r>
             <a:endParaRPr dirty="0"/>
           </a:p>
@@ -8494,7 +9448,7 @@
     <mc:Choice Requires="p159">
       <p:transition/>
     </mc:Choice>
-    <mc:Fallback xmlns="" xmlns:m="http://schemas.openxmlformats.org/officeDocument/2006/math" xmlns:w="http://schemas.openxmlformats.org/wordprocessingml/2006/main">
+    <mc:Fallback xmlns:w="http://schemas.openxmlformats.org/wordprocessingml/2006/main" xmlns:m="http://schemas.openxmlformats.org/officeDocument/2006/math" xmlns="">
       <p:transition advClick="1"/>
     </mc:Fallback>
   </mc:AlternateContent>
